--- a/2.06DomManipulation/DomManipulationIntro.pptx
+++ b/2.06DomManipulation/DomManipulationIntro.pptx
@@ -218,7 +218,7 @@
           <a:p>
             <a:fld id="{19104133-B5B0-4351-8158-4F0E5EB1E2BF}" type="datetimeFigureOut">
               <a:rPr lang="en-US" smtClean="0"/>
-              <a:t>9/4/2024</a:t>
+              <a:t>6/8/2026</a:t>
             </a:fld>
             <a:endParaRPr lang="en-US"/>
           </a:p>
@@ -1449,7 +1449,7 @@
             <a:fld id="{1C2D31DE-C454-491C-B5C3-F097855E3DF7}" type="datetime4">
               <a:rPr lang="en-US" smtClean="0"/>
               <a:pPr/>
-              <a:t>September 4, 2024</a:t>
+              <a:t>June 8, 2026</a:t>
             </a:fld>
             <a:endParaRPr lang="en-US" dirty="0"/>
           </a:p>
@@ -4841,7 +4841,7 @@
           <a:p>
             <a:fld id="{5958763E-B898-436D-883D-03711491D54A}" type="datetimeFigureOut">
               <a:rPr lang="en-US" smtClean="0"/>
-              <a:t>9/4/2024</a:t>
+              <a:t>6/8/2026</a:t>
             </a:fld>
             <a:endParaRPr lang="en-US"/>
           </a:p>
@@ -5034,7 +5034,7 @@
           <a:p>
             <a:fld id="{5958763E-B898-436D-883D-03711491D54A}" type="datetimeFigureOut">
               <a:rPr lang="en-US" smtClean="0"/>
-              <a:t>9/4/2024</a:t>
+              <a:t>6/8/2026</a:t>
             </a:fld>
             <a:endParaRPr lang="en-US"/>
           </a:p>
@@ -5284,7 +5284,7 @@
           <a:p>
             <a:fld id="{5958763E-B898-436D-883D-03711491D54A}" type="datetimeFigureOut">
               <a:rPr lang="en-US" smtClean="0"/>
-              <a:t>9/4/2024</a:t>
+              <a:t>6/8/2026</a:t>
             </a:fld>
             <a:endParaRPr lang="en-US"/>
           </a:p>
@@ -5632,7 +5632,7 @@
           <a:p>
             <a:fld id="{5958763E-B898-436D-883D-03711491D54A}" type="datetimeFigureOut">
               <a:rPr lang="en-US" smtClean="0"/>
-              <a:t>9/4/2024</a:t>
+              <a:t>6/8/2026</a:t>
             </a:fld>
             <a:endParaRPr lang="en-US"/>
           </a:p>
@@ -6048,7 +6048,7 @@
           <a:p>
             <a:fld id="{5958763E-B898-436D-883D-03711491D54A}" type="datetimeFigureOut">
               <a:rPr lang="en-US" smtClean="0"/>
-              <a:t>9/4/2024</a:t>
+              <a:t>6/8/2026</a:t>
             </a:fld>
             <a:endParaRPr lang="en-US"/>
           </a:p>
@@ -6549,7 +6549,7 @@
           <a:p>
             <a:fld id="{5958763E-B898-436D-883D-03711491D54A}" type="datetimeFigureOut">
               <a:rPr lang="en-US" smtClean="0"/>
-              <a:t>9/4/2024</a:t>
+              <a:t>6/8/2026</a:t>
             </a:fld>
             <a:endParaRPr lang="en-US"/>
           </a:p>
@@ -7000,7 +7000,7 @@
           <a:p>
             <a:fld id="{5958763E-B898-436D-883D-03711491D54A}" type="datetimeFigureOut">
               <a:rPr lang="en-US" smtClean="0"/>
-              <a:t>9/4/2024</a:t>
+              <a:t>6/8/2026</a:t>
             </a:fld>
             <a:endParaRPr lang="en-US"/>
           </a:p>
@@ -7611,7 +7611,7 @@
           <a:p>
             <a:fld id="{5958763E-B898-436D-883D-03711491D54A}" type="datetimeFigureOut">
               <a:rPr lang="en-US" smtClean="0"/>
-              <a:t>9/4/2024</a:t>
+              <a:t>6/8/2026</a:t>
             </a:fld>
             <a:endParaRPr lang="en-US"/>
           </a:p>
@@ -8382,7 +8382,7 @@
           <a:p>
             <a:fld id="{5958763E-B898-436D-883D-03711491D54A}" type="datetimeFigureOut">
               <a:rPr lang="en-US" smtClean="0"/>
-              <a:t>9/4/2024</a:t>
+              <a:t>6/8/2026</a:t>
             </a:fld>
             <a:endParaRPr lang="en-US"/>
           </a:p>
@@ -8486,7 +8486,7 @@
           <a:p>
             <a:fld id="{5958763E-B898-436D-883D-03711491D54A}" type="datetimeFigureOut">
               <a:rPr lang="en-US" smtClean="0"/>
-              <a:t>9/4/2024</a:t>
+              <a:t>6/8/2026</a:t>
             </a:fld>
             <a:endParaRPr lang="en-US"/>
           </a:p>
@@ -8813,7 +8813,7 @@
             <a:fld id="{1C2D31DE-C454-491C-B5C3-F097855E3DF7}" type="datetime4">
               <a:rPr lang="en-US" smtClean="0"/>
               <a:pPr/>
-              <a:t>September 4, 2024</a:t>
+              <a:t>June 8, 2026</a:t>
             </a:fld>
             <a:endParaRPr lang="en-US" dirty="0"/>
           </a:p>
@@ -11965,7 +11965,7 @@
           <a:p>
             <a:fld id="{5958763E-B898-436D-883D-03711491D54A}" type="datetimeFigureOut">
               <a:rPr lang="en-US" smtClean="0"/>
-              <a:t>9/4/2024</a:t>
+              <a:t>6/8/2026</a:t>
             </a:fld>
             <a:endParaRPr lang="en-US"/>
           </a:p>
@@ -12089,7 +12089,7 @@
           <a:p>
             <a:fld id="{5958763E-B898-436D-883D-03711491D54A}" type="datetimeFigureOut">
               <a:rPr lang="en-US" smtClean="0"/>
-              <a:t>9/4/2024</a:t>
+              <a:t>6/8/2026</a:t>
             </a:fld>
             <a:endParaRPr lang="en-US"/>
           </a:p>
@@ -12213,7 +12213,7 @@
           <a:p>
             <a:fld id="{5958763E-B898-436D-883D-03711491D54A}" type="datetimeFigureOut">
               <a:rPr lang="en-US" smtClean="0"/>
-              <a:t>9/4/2024</a:t>
+              <a:t>6/8/2026</a:t>
             </a:fld>
             <a:endParaRPr lang="en-US"/>
           </a:p>
@@ -12337,7 +12337,7 @@
           <a:p>
             <a:fld id="{5958763E-B898-436D-883D-03711491D54A}" type="datetimeFigureOut">
               <a:rPr lang="en-US" smtClean="0"/>
-              <a:t>9/4/2024</a:t>
+              <a:t>6/8/2026</a:t>
             </a:fld>
             <a:endParaRPr lang="en-US"/>
           </a:p>
@@ -12461,7 +12461,7 @@
           <a:p>
             <a:fld id="{5958763E-B898-436D-883D-03711491D54A}" type="datetimeFigureOut">
               <a:rPr lang="en-US" smtClean="0"/>
-              <a:t>9/4/2024</a:t>
+              <a:t>6/8/2026</a:t>
             </a:fld>
             <a:endParaRPr lang="en-US"/>
           </a:p>
@@ -12585,7 +12585,7 @@
           <a:p>
             <a:fld id="{5958763E-B898-436D-883D-03711491D54A}" type="datetimeFigureOut">
               <a:rPr lang="en-US" smtClean="0"/>
-              <a:t>9/4/2024</a:t>
+              <a:t>6/8/2026</a:t>
             </a:fld>
             <a:endParaRPr lang="en-US"/>
           </a:p>
@@ -12709,7 +12709,7 @@
           <a:p>
             <a:fld id="{5958763E-B898-436D-883D-03711491D54A}" type="datetimeFigureOut">
               <a:rPr lang="en-US" smtClean="0"/>
-              <a:t>9/4/2024</a:t>
+              <a:t>6/8/2026</a:t>
             </a:fld>
             <a:endParaRPr lang="en-US"/>
           </a:p>
@@ -12833,7 +12833,7 @@
           <a:p>
             <a:fld id="{5958763E-B898-436D-883D-03711491D54A}" type="datetimeFigureOut">
               <a:rPr lang="en-US" smtClean="0"/>
-              <a:t>9/4/2024</a:t>
+              <a:t>6/8/2026</a:t>
             </a:fld>
             <a:endParaRPr lang="en-US"/>
           </a:p>
@@ -12966,7 +12966,7 @@
           <a:p>
             <a:fld id="{5958763E-B898-436D-883D-03711491D54A}" type="datetimeFigureOut">
               <a:rPr lang="en-US" smtClean="0"/>
-              <a:t>9/4/2024</a:t>
+              <a:t>6/8/2026</a:t>
             </a:fld>
             <a:endParaRPr lang="en-US"/>
           </a:p>
@@ -16305,7 +16305,7 @@
             <a:fld id="{1C2D31DE-C454-491C-B5C3-F097855E3DF7}" type="datetime4">
               <a:rPr lang="en-US" smtClean="0"/>
               <a:pPr/>
-              <a:t>September 4, 2024</a:t>
+              <a:t>June 8, 2026</a:t>
             </a:fld>
             <a:endParaRPr lang="en-US" dirty="0"/>
           </a:p>
@@ -28541,7 +28541,7 @@
           <a:p>
             <a:fld id="{5958763E-B898-436D-883D-03711491D54A}" type="datetimeFigureOut">
               <a:rPr lang="en-US" smtClean="0"/>
-              <a:t>9/4/2024</a:t>
+              <a:t>6/8/2026</a:t>
             </a:fld>
             <a:endParaRPr lang="en-US"/>
           </a:p>
@@ -28943,7 +28943,7 @@
           <a:p>
             <a:fld id="{5958763E-B898-436D-883D-03711491D54A}" type="datetimeFigureOut">
               <a:rPr lang="en-US" smtClean="0"/>
-              <a:t>9/4/2024</a:t>
+              <a:t>6/8/2026</a:t>
             </a:fld>
             <a:endParaRPr lang="en-US"/>
           </a:p>
@@ -29237,7 +29237,7 @@
           <a:p>
             <a:fld id="{5958763E-B898-436D-883D-03711491D54A}" type="datetimeFigureOut">
               <a:rPr lang="en-US" smtClean="0"/>
-              <a:t>9/4/2024</a:t>
+              <a:t>6/8/2026</a:t>
             </a:fld>
             <a:endParaRPr lang="en-US"/>
           </a:p>
@@ -29438,7 +29438,7 @@
           <a:p>
             <a:fld id="{5958763E-B898-436D-883D-03711491D54A}" type="datetimeFigureOut">
               <a:rPr lang="en-US" smtClean="0"/>
-              <a:t>9/4/2024</a:t>
+              <a:t>6/8/2026</a:t>
             </a:fld>
             <a:endParaRPr lang="en-US"/>
           </a:p>
@@ -29699,7 +29699,7 @@
           <a:p>
             <a:fld id="{5958763E-B898-436D-883D-03711491D54A}" type="datetimeFigureOut">
               <a:rPr lang="en-US" smtClean="0"/>
-              <a:t>9/4/2024</a:t>
+              <a:t>6/8/2026</a:t>
             </a:fld>
             <a:endParaRPr lang="en-US"/>
           </a:p>
@@ -30207,7 +30207,7 @@
           <a:p>
             <a:fld id="{5958763E-B898-436D-883D-03711491D54A}" type="datetimeFigureOut">
               <a:rPr lang="en-US" smtClean="0"/>
-              <a:t>9/4/2024</a:t>
+              <a:t>6/8/2026</a:t>
             </a:fld>
             <a:endParaRPr lang="en-US"/>
           </a:p>
@@ -30686,7 +30686,7 @@
           <a:p>
             <a:fld id="{5958763E-B898-436D-883D-03711491D54A}" type="datetimeFigureOut">
               <a:rPr lang="en-US" smtClean="0"/>
-              <a:t>9/4/2024</a:t>
+              <a:t>6/8/2026</a:t>
             </a:fld>
             <a:endParaRPr lang="en-US"/>
           </a:p>
@@ -31505,7 +31505,7 @@
           <a:p>
             <a:fld id="{5958763E-B898-436D-883D-03711491D54A}" type="datetimeFigureOut">
               <a:rPr lang="en-US" smtClean="0"/>
-              <a:t>9/4/2024</a:t>
+              <a:t>6/8/2026</a:t>
             </a:fld>
             <a:endParaRPr lang="en-US"/>
           </a:p>
@@ -31706,7 +31706,7 @@
           <a:p>
             <a:fld id="{5958763E-B898-436D-883D-03711491D54A}" type="datetimeFigureOut">
               <a:rPr lang="en-US" smtClean="0"/>
-              <a:t>9/4/2024</a:t>
+              <a:t>6/8/2026</a:t>
             </a:fld>
             <a:endParaRPr lang="en-US"/>
           </a:p>
@@ -32041,7 +32041,7 @@
           <a:p>
             <a:fld id="{5958763E-B898-436D-883D-03711491D54A}" type="datetimeFigureOut">
               <a:rPr lang="en-US" smtClean="0"/>
-              <a:t>9/4/2024</a:t>
+              <a:t>6/8/2026</a:t>
             </a:fld>
             <a:endParaRPr lang="en-US"/>
           </a:p>
@@ -32271,7 +32271,7 @@
           <a:p>
             <a:fld id="{5958763E-B898-436D-883D-03711491D54A}" type="datetimeFigureOut">
               <a:rPr lang="en-US" smtClean="0"/>
-              <a:t>9/4/2024</a:t>
+              <a:t>6/8/2026</a:t>
             </a:fld>
             <a:endParaRPr lang="en-US"/>
           </a:p>
@@ -32515,7 +32515,7 @@
           <a:p>
             <a:fld id="{5958763E-B898-436D-883D-03711491D54A}" type="datetimeFigureOut">
               <a:rPr lang="en-US" smtClean="0"/>
-              <a:t>9/4/2024</a:t>
+              <a:t>6/8/2026</a:t>
             </a:fld>
             <a:endParaRPr lang="en-US"/>
           </a:p>
@@ -33063,7 +33063,7 @@
         <p:spPr>
           <a:xfrm>
             <a:off x="381000" y="3429000"/>
-            <a:ext cx="4883068" cy="553998"/>
+            <a:ext cx="5859489" cy="553998"/>
           </a:xfrm>
         </p:spPr>
         <p:txBody>
@@ -33071,12 +33071,8 @@
           <a:lstStyle/>
           <a:p>
             <a:r>
-              <a:rPr lang="en-US" dirty="0"/>
-              <a:t>Hy-Tech Club: </a:t>
-            </a:r>
-            <a:r>
               <a:rPr lang="en-US"/>
-              <a:t>Web 102</a:t>
+              <a:t>HTO: Website Development</a:t>
             </a:r>
             <a:endParaRPr lang="en-US" dirty="0"/>
           </a:p>
